--- a/Router Security.pptx
+++ b/Router Security.pptx
@@ -7,8 +7,11 @@
   <p:sldIdLst>
     <p:sldId id="259" r:id="rId2"/>
     <p:sldId id="260" r:id="rId3"/>
-    <p:sldId id="261" r:id="rId4"/>
-    <p:sldId id="262" r:id="rId5"/>
+    <p:sldId id="263" r:id="rId4"/>
+    <p:sldId id="261" r:id="rId5"/>
+    <p:sldId id="264" r:id="rId6"/>
+    <p:sldId id="265" r:id="rId7"/>
+    <p:sldId id="262" r:id="rId8"/>
   </p:sldIdLst>
   <p:sldSz cx="7199313" cy="8999538"/>
   <p:notesSz cx="6858000" cy="9144000"/>
@@ -257,7 +260,7 @@
           <a:p>
             <a:fld id="{1B20C5F4-D6A3-40FD-8209-B4822E359ED0}" type="datetimeFigureOut">
               <a:rPr lang="en-IN" smtClean="0"/>
-              <a:t>28-08-2025</a:t>
+              <a:t>11-11-2025</a:t>
             </a:fld>
             <a:endParaRPr lang="en-IN"/>
           </a:p>
@@ -427,7 +430,7 @@
           <a:p>
             <a:fld id="{1B20C5F4-D6A3-40FD-8209-B4822E359ED0}" type="datetimeFigureOut">
               <a:rPr lang="en-IN" smtClean="0"/>
-              <a:t>28-08-2025</a:t>
+              <a:t>11-11-2025</a:t>
             </a:fld>
             <a:endParaRPr lang="en-IN"/>
           </a:p>
@@ -607,7 +610,7 @@
           <a:p>
             <a:fld id="{1B20C5F4-D6A3-40FD-8209-B4822E359ED0}" type="datetimeFigureOut">
               <a:rPr lang="en-IN" smtClean="0"/>
-              <a:t>28-08-2025</a:t>
+              <a:t>11-11-2025</a:t>
             </a:fld>
             <a:endParaRPr lang="en-IN"/>
           </a:p>
@@ -777,7 +780,7 @@
           <a:p>
             <a:fld id="{1B20C5F4-D6A3-40FD-8209-B4822E359ED0}" type="datetimeFigureOut">
               <a:rPr lang="en-IN" smtClean="0"/>
-              <a:t>28-08-2025</a:t>
+              <a:t>11-11-2025</a:t>
             </a:fld>
             <a:endParaRPr lang="en-IN"/>
           </a:p>
@@ -1021,7 +1024,7 @@
           <a:p>
             <a:fld id="{1B20C5F4-D6A3-40FD-8209-B4822E359ED0}" type="datetimeFigureOut">
               <a:rPr lang="en-IN" smtClean="0"/>
-              <a:t>28-08-2025</a:t>
+              <a:t>11-11-2025</a:t>
             </a:fld>
             <a:endParaRPr lang="en-IN"/>
           </a:p>
@@ -1253,7 +1256,7 @@
           <a:p>
             <a:fld id="{1B20C5F4-D6A3-40FD-8209-B4822E359ED0}" type="datetimeFigureOut">
               <a:rPr lang="en-IN" smtClean="0"/>
-              <a:t>28-08-2025</a:t>
+              <a:t>11-11-2025</a:t>
             </a:fld>
             <a:endParaRPr lang="en-IN"/>
           </a:p>
@@ -1620,7 +1623,7 @@
           <a:p>
             <a:fld id="{1B20C5F4-D6A3-40FD-8209-B4822E359ED0}" type="datetimeFigureOut">
               <a:rPr lang="en-IN" smtClean="0"/>
-              <a:t>28-08-2025</a:t>
+              <a:t>11-11-2025</a:t>
             </a:fld>
             <a:endParaRPr lang="en-IN"/>
           </a:p>
@@ -1738,7 +1741,7 @@
           <a:p>
             <a:fld id="{1B20C5F4-D6A3-40FD-8209-B4822E359ED0}" type="datetimeFigureOut">
               <a:rPr lang="en-IN" smtClean="0"/>
-              <a:t>28-08-2025</a:t>
+              <a:t>11-11-2025</a:t>
             </a:fld>
             <a:endParaRPr lang="en-IN"/>
           </a:p>
@@ -1833,7 +1836,7 @@
           <a:p>
             <a:fld id="{1B20C5F4-D6A3-40FD-8209-B4822E359ED0}" type="datetimeFigureOut">
               <a:rPr lang="en-IN" smtClean="0"/>
-              <a:t>28-08-2025</a:t>
+              <a:t>11-11-2025</a:t>
             </a:fld>
             <a:endParaRPr lang="en-IN"/>
           </a:p>
@@ -2110,7 +2113,7 @@
           <a:p>
             <a:fld id="{1B20C5F4-D6A3-40FD-8209-B4822E359ED0}" type="datetimeFigureOut">
               <a:rPr lang="en-IN" smtClean="0"/>
-              <a:t>28-08-2025</a:t>
+              <a:t>11-11-2025</a:t>
             </a:fld>
             <a:endParaRPr lang="en-IN"/>
           </a:p>
@@ -2367,7 +2370,7 @@
           <a:p>
             <a:fld id="{1B20C5F4-D6A3-40FD-8209-B4822E359ED0}" type="datetimeFigureOut">
               <a:rPr lang="en-IN" smtClean="0"/>
-              <a:t>28-08-2025</a:t>
+              <a:t>11-11-2025</a:t>
             </a:fld>
             <a:endParaRPr lang="en-IN"/>
           </a:p>
@@ -2580,7 +2583,7 @@
           <a:p>
             <a:fld id="{1B20C5F4-D6A3-40FD-8209-B4822E359ED0}" type="datetimeFigureOut">
               <a:rPr lang="en-IN" smtClean="0"/>
-              <a:t>28-08-2025</a:t>
+              <a:t>11-11-2025</a:t>
             </a:fld>
             <a:endParaRPr lang="en-IN"/>
           </a:p>
@@ -3154,17 +3157,6 @@
               <a:rPr lang="en-US" sz="1600" b="1" dirty="0"/>
               <a:t>      </a:t>
             </a:r>
-          </a:p>
-          <a:p>
-            <a:pPr algn="l"/>
-            <a:endParaRPr lang="en-US" sz="1600" b="1" dirty="0"/>
-          </a:p>
-          <a:p>
-            <a:pPr algn="l"/>
-            <a:r>
-              <a:rPr lang="en-US" sz="1600" b="1" dirty="0"/>
-              <a:t>      </a:t>
-            </a:r>
             <a:r>
               <a:rPr lang="en-US" sz="1800" b="1" dirty="0"/>
               <a:t>!! Create Standard ACL (1-99  ||  1300-1999) </a:t>
@@ -3328,7 +3320,7 @@
         </p:blipFill>
         <p:spPr>
           <a:xfrm>
-            <a:off x="500587" y="2442695"/>
+            <a:off x="581610" y="2034314"/>
             <a:ext cx="6036091" cy="2774833"/>
           </a:xfrm>
           <a:prstGeom prst="rect">
@@ -3372,6 +3364,36 @@
           </a:p>
         </p:txBody>
       </p:sp>
+      <p:pic>
+        <p:nvPicPr>
+          <p:cNvPr id="6" name="Picture 5">
+            <a:extLst>
+              <a:ext uri="{FF2B5EF4-FFF2-40B4-BE49-F238E27FC236}">
+                <a16:creationId xmlns:a16="http://schemas.microsoft.com/office/drawing/2014/main" id="{B6941FA7-3B2C-C253-F8B4-56AAFB2C46F6}"/>
+              </a:ext>
+            </a:extLst>
+          </p:cNvPr>
+          <p:cNvPicPr>
+            <a:picLocks noChangeAspect="1"/>
+          </p:cNvPicPr>
+          <p:nvPr/>
+        </p:nvPicPr>
+        <p:blipFill>
+          <a:blip r:embed="rId4"/>
+          <a:stretch>
+            <a:fillRect/>
+          </a:stretch>
+        </p:blipFill>
+        <p:spPr>
+          <a:xfrm>
+            <a:off x="81279" y="7641433"/>
+            <a:ext cx="6913292" cy="1257797"/>
+          </a:xfrm>
+          <a:prstGeom prst="rect">
+            <a:avLst/>
+          </a:prstGeom>
+        </p:spPr>
+      </p:pic>
     </p:spTree>
     <p:extLst>
       <p:ext uri="{BB962C8B-B14F-4D97-AF65-F5344CB8AC3E}">
@@ -3815,6 +3837,117 @@
 </file>
 
 <file path=ppt/slides/slide3.xml><?xml version="1.0" encoding="utf-8"?>
+<p:sld xmlns:a="http://schemas.openxmlformats.org/drawingml/2006/main" xmlns:r="http://schemas.openxmlformats.org/officeDocument/2006/relationships" xmlns:p="http://schemas.openxmlformats.org/presentationml/2006/main" showMasterSp="0">
+  <p:cSld>
+    <p:bg>
+      <p:bgPr>
+        <a:blipFill dpi="0" rotWithShape="1">
+          <a:blip r:embed="rId2">
+            <a:alphaModFix amt="24000"/>
+            <a:lum/>
+          </a:blip>
+          <a:srcRect/>
+          <a:stretch>
+            <a:fillRect l="-16000" r="-16000"/>
+          </a:stretch>
+        </a:blipFill>
+        <a:effectLst/>
+      </p:bgPr>
+    </p:bg>
+    <p:spTree>
+      <p:nvGrpSpPr>
+        <p:cNvPr id="1" name="">
+          <a:extLst>
+            <a:ext uri="{FF2B5EF4-FFF2-40B4-BE49-F238E27FC236}">
+              <a16:creationId xmlns:a16="http://schemas.microsoft.com/office/drawing/2014/main" id="{6A0B58B2-B4DE-72D4-EC3B-E5A010A51305}"/>
+            </a:ext>
+          </a:extLst>
+        </p:cNvPr>
+        <p:cNvGrpSpPr/>
+        <p:nvPr/>
+      </p:nvGrpSpPr>
+      <p:grpSpPr>
+        <a:xfrm>
+          <a:off x="0" y="0"/>
+          <a:ext cx="0" cy="0"/>
+          <a:chOff x="0" y="0"/>
+          <a:chExt cx="0" cy="0"/>
+        </a:xfrm>
+      </p:grpSpPr>
+      <p:pic>
+        <p:nvPicPr>
+          <p:cNvPr id="7" name="Picture 6">
+            <a:extLst>
+              <a:ext uri="{FF2B5EF4-FFF2-40B4-BE49-F238E27FC236}">
+                <a16:creationId xmlns:a16="http://schemas.microsoft.com/office/drawing/2014/main" id="{ADA3F5F9-4A15-33D2-ACC6-CA934D7791BC}"/>
+              </a:ext>
+            </a:extLst>
+          </p:cNvPr>
+          <p:cNvPicPr>
+            <a:picLocks noChangeAspect="1"/>
+          </p:cNvPicPr>
+          <p:nvPr/>
+        </p:nvPicPr>
+        <p:blipFill>
+          <a:blip r:embed="rId3"/>
+          <a:stretch>
+            <a:fillRect/>
+          </a:stretch>
+        </p:blipFill>
+        <p:spPr>
+          <a:xfrm>
+            <a:off x="63500" y="160599"/>
+            <a:ext cx="7073900" cy="2212908"/>
+          </a:xfrm>
+          <a:prstGeom prst="rect">
+            <a:avLst/>
+          </a:prstGeom>
+        </p:spPr>
+      </p:pic>
+      <p:pic>
+        <p:nvPicPr>
+          <p:cNvPr id="10" name="Picture 9">
+            <a:extLst>
+              <a:ext uri="{FF2B5EF4-FFF2-40B4-BE49-F238E27FC236}">
+                <a16:creationId xmlns:a16="http://schemas.microsoft.com/office/drawing/2014/main" id="{3FB92255-C5B3-6B88-D44D-0C5E5B8E4B2F}"/>
+              </a:ext>
+            </a:extLst>
+          </p:cNvPr>
+          <p:cNvPicPr>
+            <a:picLocks noChangeAspect="1"/>
+          </p:cNvPicPr>
+          <p:nvPr/>
+        </p:nvPicPr>
+        <p:blipFill>
+          <a:blip r:embed="rId4"/>
+          <a:stretch>
+            <a:fillRect/>
+          </a:stretch>
+        </p:blipFill>
+        <p:spPr>
+          <a:xfrm>
+            <a:off x="88901" y="2619401"/>
+            <a:ext cx="6985000" cy="2613742"/>
+          </a:xfrm>
+          <a:prstGeom prst="rect">
+            <a:avLst/>
+          </a:prstGeom>
+        </p:spPr>
+      </p:pic>
+    </p:spTree>
+    <p:extLst>
+      <p:ext uri="{BB962C8B-B14F-4D97-AF65-F5344CB8AC3E}">
+        <p14:creationId xmlns:p14="http://schemas.microsoft.com/office/powerpoint/2010/main" val="3834582954"/>
+      </p:ext>
+    </p:extLst>
+  </p:cSld>
+  <p:clrMapOvr>
+    <a:masterClrMapping/>
+  </p:clrMapOvr>
+</p:sld>
+</file>
+
+<file path=ppt/slides/slide4.xml><?xml version="1.0" encoding="utf-8"?>
 <p:sld xmlns:a="http://schemas.openxmlformats.org/drawingml/2006/main" xmlns:r="http://schemas.openxmlformats.org/officeDocument/2006/relationships" xmlns:p="http://schemas.openxmlformats.org/presentationml/2006/main" showMasterSp="0">
   <p:cSld>
     <p:bg>
@@ -4216,7 +4349,431 @@
 </p:sld>
 </file>
 
-<file path=ppt/slides/slide4.xml><?xml version="1.0" encoding="utf-8"?>
+<file path=ppt/slides/slide5.xml><?xml version="1.0" encoding="utf-8"?>
+<p:sld xmlns:a="http://schemas.openxmlformats.org/drawingml/2006/main" xmlns:r="http://schemas.openxmlformats.org/officeDocument/2006/relationships" xmlns:p="http://schemas.openxmlformats.org/presentationml/2006/main" showMasterSp="0">
+  <p:cSld>
+    <p:bg>
+      <p:bgPr>
+        <a:blipFill dpi="0" rotWithShape="1">
+          <a:blip r:embed="rId2">
+            <a:alphaModFix amt="24000"/>
+            <a:lum/>
+          </a:blip>
+          <a:srcRect/>
+          <a:stretch>
+            <a:fillRect l="-16000" r="-16000"/>
+          </a:stretch>
+        </a:blipFill>
+        <a:effectLst/>
+      </p:bgPr>
+    </p:bg>
+    <p:spTree>
+      <p:nvGrpSpPr>
+        <p:cNvPr id="1" name="">
+          <a:extLst>
+            <a:ext uri="{FF2B5EF4-FFF2-40B4-BE49-F238E27FC236}">
+              <a16:creationId xmlns:a16="http://schemas.microsoft.com/office/drawing/2014/main" id="{ED33F0BD-E281-8D7C-1DB2-8D7DB16ACC1F}"/>
+            </a:ext>
+          </a:extLst>
+        </p:cNvPr>
+        <p:cNvGrpSpPr/>
+        <p:nvPr/>
+      </p:nvGrpSpPr>
+      <p:grpSpPr>
+        <a:xfrm>
+          <a:off x="0" y="0"/>
+          <a:ext cx="0" cy="0"/>
+          <a:chOff x="0" y="0"/>
+          <a:chExt cx="0" cy="0"/>
+        </a:xfrm>
+      </p:grpSpPr>
+      <p:sp>
+        <p:nvSpPr>
+          <p:cNvPr id="3" name="Subtitle 2">
+            <a:extLst>
+              <a:ext uri="{FF2B5EF4-FFF2-40B4-BE49-F238E27FC236}">
+                <a16:creationId xmlns:a16="http://schemas.microsoft.com/office/drawing/2014/main" id="{196AB8DC-94C9-6446-F490-86A2A5CD2F92}"/>
+              </a:ext>
+            </a:extLst>
+          </p:cNvPr>
+          <p:cNvSpPr>
+            <a:spLocks noGrp="1"/>
+          </p:cNvSpPr>
+          <p:nvPr>
+            <p:ph type="subTitle" idx="1"/>
+          </p:nvPr>
+        </p:nvSpPr>
+        <p:spPr>
+          <a:xfrm>
+            <a:off x="0" y="88900"/>
+            <a:ext cx="7199313" cy="8910638"/>
+          </a:xfrm>
+        </p:spPr>
+        <p:txBody>
+          <a:bodyPr>
+            <a:noAutofit/>
+          </a:bodyPr>
+          <a:lstStyle/>
+          <a:p>
+            <a:pPr algn="l">
+              <a:lnSpc>
+                <a:spcPct val="120000"/>
+              </a:lnSpc>
+            </a:pPr>
+            <a:r>
+              <a:rPr lang="en-US" sz="2000" b="1" dirty="0"/>
+              <a:t>3. Prefix List</a:t>
+            </a:r>
+            <a:endParaRPr lang="en-US" sz="1900" b="1" dirty="0"/>
+          </a:p>
+          <a:p>
+            <a:pPr algn="l"/>
+            <a:r>
+              <a:rPr lang="en-US" sz="2000" dirty="0"/>
+              <a:t>A prefix list is used to filter network prefixes (routes) based on:</a:t>
+            </a:r>
+          </a:p>
+          <a:p>
+            <a:pPr algn="l"/>
+            <a:r>
+              <a:rPr lang="en-US" sz="2000" dirty="0"/>
+              <a:t>• The network address (e.g., 10.0.0.0)</a:t>
+            </a:r>
+          </a:p>
+          <a:p>
+            <a:pPr algn="l"/>
+            <a:r>
+              <a:rPr lang="en-US" sz="2000" dirty="0"/>
+              <a:t>• The prefix length (e.g., /8, /24, /32)</a:t>
+            </a:r>
+          </a:p>
+          <a:p>
+            <a:pPr algn="l"/>
+            <a:endParaRPr lang="en-US" sz="2000" dirty="0"/>
+          </a:p>
+          <a:p>
+            <a:pPr algn="l"/>
+            <a:r>
+              <a:rPr lang="en-US" sz="1900" dirty="0" err="1">
+                <a:highlight>
+                  <a:srgbClr val="FFFF00"/>
+                </a:highlight>
+              </a:rPr>
+              <a:t>ip</a:t>
+            </a:r>
+            <a:r>
+              <a:rPr lang="en-US" sz="1900" dirty="0">
+                <a:highlight>
+                  <a:srgbClr val="FFFF00"/>
+                </a:highlight>
+              </a:rPr>
+              <a:t> prefix-list MY-LIST seq 5 permit 10.0.0.0/8 le 24</a:t>
+            </a:r>
+          </a:p>
+          <a:p>
+            <a:pPr algn="l"/>
+            <a:r>
+              <a:rPr lang="en-US" sz="1900" dirty="0" err="1">
+                <a:highlight>
+                  <a:srgbClr val="FFFF00"/>
+                </a:highlight>
+              </a:rPr>
+              <a:t>ip</a:t>
+            </a:r>
+            <a:r>
+              <a:rPr lang="en-US" sz="1900" dirty="0">
+                <a:highlight>
+                  <a:srgbClr val="FFFF00"/>
+                </a:highlight>
+              </a:rPr>
+              <a:t> prefix-list MY-LIST seq 10 deny 192.168.0.0/16</a:t>
+            </a:r>
+          </a:p>
+          <a:p>
+            <a:pPr algn="l"/>
+            <a:r>
+              <a:rPr lang="en-US" sz="1900" dirty="0" err="1">
+                <a:highlight>
+                  <a:srgbClr val="FFFF00"/>
+                </a:highlight>
+              </a:rPr>
+              <a:t>ip</a:t>
+            </a:r>
+            <a:r>
+              <a:rPr lang="en-US" sz="1900" dirty="0">
+                <a:highlight>
+                  <a:srgbClr val="FFFF00"/>
+                </a:highlight>
+              </a:rPr>
+              <a:t> prefix-list MY-LIST seq 15 permit 0.0.0.0/0 le 32</a:t>
+            </a:r>
+          </a:p>
+          <a:p>
+            <a:pPr algn="l"/>
+            <a:endParaRPr lang="en-US" sz="1900" dirty="0"/>
+          </a:p>
+          <a:p>
+            <a:pPr algn="l"/>
+            <a:endParaRPr lang="en-US" sz="1900" b="1" dirty="0"/>
+          </a:p>
+          <a:p>
+            <a:pPr algn="l"/>
+            <a:r>
+              <a:rPr lang="en-US" sz="1900" b="1" dirty="0"/>
+              <a:t>                                        </a:t>
+            </a:r>
+            <a:endParaRPr lang="en-IN" sz="1900" dirty="0"/>
+          </a:p>
+        </p:txBody>
+      </p:sp>
+    </p:spTree>
+    <p:extLst>
+      <p:ext uri="{BB962C8B-B14F-4D97-AF65-F5344CB8AC3E}">
+        <p14:creationId xmlns:p14="http://schemas.microsoft.com/office/powerpoint/2010/main" val="2253038751"/>
+      </p:ext>
+    </p:extLst>
+  </p:cSld>
+  <p:clrMapOvr>
+    <a:masterClrMapping/>
+  </p:clrMapOvr>
+</p:sld>
+</file>
+
+<file path=ppt/slides/slide6.xml><?xml version="1.0" encoding="utf-8"?>
+<p:sld xmlns:a="http://schemas.openxmlformats.org/drawingml/2006/main" xmlns:r="http://schemas.openxmlformats.org/officeDocument/2006/relationships" xmlns:p="http://schemas.openxmlformats.org/presentationml/2006/main" showMasterSp="0">
+  <p:cSld>
+    <p:bg>
+      <p:bgPr>
+        <a:blipFill dpi="0" rotWithShape="1">
+          <a:blip r:embed="rId2">
+            <a:alphaModFix amt="24000"/>
+            <a:lum/>
+          </a:blip>
+          <a:srcRect/>
+          <a:stretch>
+            <a:fillRect l="-16000" r="-16000"/>
+          </a:stretch>
+        </a:blipFill>
+        <a:effectLst/>
+      </p:bgPr>
+    </p:bg>
+    <p:spTree>
+      <p:nvGrpSpPr>
+        <p:cNvPr id="1" name="">
+          <a:extLst>
+            <a:ext uri="{FF2B5EF4-FFF2-40B4-BE49-F238E27FC236}">
+              <a16:creationId xmlns:a16="http://schemas.microsoft.com/office/drawing/2014/main" id="{3639FD3E-5266-ADC3-2070-9BEDA2AD7F3C}"/>
+            </a:ext>
+          </a:extLst>
+        </p:cNvPr>
+        <p:cNvGrpSpPr/>
+        <p:nvPr/>
+      </p:nvGrpSpPr>
+      <p:grpSpPr>
+        <a:xfrm>
+          <a:off x="0" y="0"/>
+          <a:ext cx="0" cy="0"/>
+          <a:chOff x="0" y="0"/>
+          <a:chExt cx="0" cy="0"/>
+        </a:xfrm>
+      </p:grpSpPr>
+      <p:sp>
+        <p:nvSpPr>
+          <p:cNvPr id="3" name="Subtitle 2">
+            <a:extLst>
+              <a:ext uri="{FF2B5EF4-FFF2-40B4-BE49-F238E27FC236}">
+                <a16:creationId xmlns:a16="http://schemas.microsoft.com/office/drawing/2014/main" id="{E63E05FA-598B-B1F0-DA85-5A4B658BE24C}"/>
+              </a:ext>
+            </a:extLst>
+          </p:cNvPr>
+          <p:cNvSpPr>
+            <a:spLocks noGrp="1"/>
+          </p:cNvSpPr>
+          <p:nvPr>
+            <p:ph type="subTitle" idx="1"/>
+          </p:nvPr>
+        </p:nvSpPr>
+        <p:spPr>
+          <a:xfrm>
+            <a:off x="0" y="88900"/>
+            <a:ext cx="7199313" cy="8910638"/>
+          </a:xfrm>
+        </p:spPr>
+        <p:txBody>
+          <a:bodyPr>
+            <a:noAutofit/>
+          </a:bodyPr>
+          <a:lstStyle/>
+          <a:p>
+            <a:pPr algn="l">
+              <a:lnSpc>
+                <a:spcPct val="120000"/>
+              </a:lnSpc>
+            </a:pPr>
+            <a:r>
+              <a:rPr lang="en-US" sz="2000" b="1" dirty="0"/>
+              <a:t>3. Route Map</a:t>
+            </a:r>
+            <a:endParaRPr lang="en-US" sz="1900" b="1" dirty="0"/>
+          </a:p>
+          <a:p>
+            <a:pPr algn="l"/>
+            <a:r>
+              <a:rPr lang="en-US" sz="2000" dirty="0"/>
+              <a:t>Route maps are like “if–then” statements for routing.</a:t>
+            </a:r>
+            <a:br>
+              <a:rPr lang="en-US" sz="2000" dirty="0"/>
+            </a:br>
+            <a:r>
+              <a:rPr lang="en-US" sz="2000" dirty="0"/>
+              <a:t>They let you:</a:t>
+            </a:r>
+          </a:p>
+          <a:p>
+            <a:pPr algn="l"/>
+            <a:r>
+              <a:rPr lang="en-US" sz="2000" dirty="0"/>
+              <a:t>• Filter routes (like ACLs do), and</a:t>
+            </a:r>
+          </a:p>
+          <a:p>
+            <a:pPr algn="l"/>
+            <a:r>
+              <a:rPr lang="en-US" sz="2000" dirty="0"/>
+              <a:t>• Modify route attributes (which ACLs cannot).</a:t>
+            </a:r>
+          </a:p>
+          <a:p>
+            <a:pPr algn="l"/>
+            <a:r>
+              <a:rPr lang="en-US" sz="2000" dirty="0"/>
+              <a:t>They are especially important in BGP, because you can define custom routing policies per neighbor.</a:t>
+            </a:r>
+          </a:p>
+          <a:p>
+            <a:pPr algn="l"/>
+            <a:r>
+              <a:rPr lang="en-US" sz="1900" dirty="0"/>
+              <a:t>Route Map Components</a:t>
+            </a:r>
+          </a:p>
+          <a:p>
+            <a:pPr algn="l"/>
+            <a:endParaRPr lang="en-US" sz="1900" dirty="0"/>
+          </a:p>
+          <a:p>
+            <a:pPr algn="l"/>
+            <a:r>
+              <a:rPr lang="en-US" sz="1900" dirty="0"/>
+              <a:t>A route map has four parts:</a:t>
+            </a:r>
+          </a:p>
+          <a:p>
+            <a:pPr algn="l"/>
+            <a:r>
+              <a:rPr lang="en-US" sz="1900" dirty="0"/>
+              <a:t>1. Sequence Number</a:t>
+            </a:r>
+          </a:p>
+          <a:p>
+            <a:pPr algn="l"/>
+            <a:r>
+              <a:rPr lang="en-US" sz="1900" dirty="0"/>
+              <a:t>Determines the order in which each part of the route map is checked.</a:t>
+            </a:r>
+          </a:p>
+          <a:p>
+            <a:pPr algn="l"/>
+            <a:r>
+              <a:rPr lang="en-US" sz="1900" dirty="0"/>
+              <a:t>Example: sequence 10 is processed before sequence 20.</a:t>
+            </a:r>
+          </a:p>
+          <a:p>
+            <a:pPr algn="l"/>
+            <a:r>
+              <a:rPr lang="en-US" sz="1900" dirty="0"/>
+              <a:t>2. Matching Condition (if)</a:t>
+            </a:r>
+          </a:p>
+          <a:p>
+            <a:pPr algn="l"/>
+            <a:r>
+              <a:rPr lang="en-US" sz="1900" dirty="0"/>
+              <a:t>Defines which routes the statement applies to (like IP prefix, AS path, next-hop, etc.).</a:t>
+            </a:r>
+          </a:p>
+          <a:p>
+            <a:pPr algn="l"/>
+            <a:r>
+              <a:rPr lang="en-US" sz="1900" dirty="0"/>
+              <a:t>Example: match IP addresses in an ACL or prefix list.</a:t>
+            </a:r>
+          </a:p>
+          <a:p>
+            <a:pPr algn="l"/>
+            <a:r>
+              <a:rPr lang="en-US" sz="1900" dirty="0"/>
+              <a:t>3.Action (then)</a:t>
+            </a:r>
+          </a:p>
+          <a:p>
+            <a:pPr algn="l"/>
+            <a:r>
+              <a:rPr lang="en-US" sz="1900" dirty="0"/>
+              <a:t>What to do when a route matches.</a:t>
+            </a:r>
+          </a:p>
+          <a:p>
+            <a:pPr algn="l"/>
+            <a:r>
+              <a:rPr lang="en-US" sz="1900" dirty="0"/>
+              <a:t>Either permit (allow and possibly modify) or deny (block).</a:t>
+            </a:r>
+          </a:p>
+          <a:p>
+            <a:pPr algn="l"/>
+            <a:r>
+              <a:rPr lang="en-US" sz="1900" dirty="0"/>
+              <a:t>4. Optional Actions (modifications)</a:t>
+            </a:r>
+          </a:p>
+          <a:p>
+            <a:pPr algn="l"/>
+            <a:r>
+              <a:rPr lang="en-US" sz="1900" dirty="0"/>
+              <a:t>Additional actions, such as setting or changing attributes (metric, local preference, next-hop, etc.).</a:t>
+            </a:r>
+          </a:p>
+          <a:p>
+            <a:pPr algn="l"/>
+            <a:endParaRPr lang="en-US" sz="1900" b="1" dirty="0"/>
+          </a:p>
+          <a:p>
+            <a:pPr algn="l"/>
+            <a:r>
+              <a:rPr lang="en-US" sz="1900" b="1" dirty="0"/>
+              <a:t>                                        </a:t>
+            </a:r>
+            <a:endParaRPr lang="en-IN" sz="1900" dirty="0"/>
+          </a:p>
+        </p:txBody>
+      </p:sp>
+    </p:spTree>
+    <p:extLst>
+      <p:ext uri="{BB962C8B-B14F-4D97-AF65-F5344CB8AC3E}">
+        <p14:creationId xmlns:p14="http://schemas.microsoft.com/office/powerpoint/2010/main" val="1036472422"/>
+      </p:ext>
+    </p:extLst>
+  </p:cSld>
+  <p:clrMapOvr>
+    <a:masterClrMapping/>
+  </p:clrMapOvr>
+</p:sld>
+</file>
+
+<file path=ppt/slides/slide7.xml><?xml version="1.0" encoding="utf-8"?>
 <p:sld xmlns:a="http://schemas.openxmlformats.org/drawingml/2006/main" xmlns:r="http://schemas.openxmlformats.org/officeDocument/2006/relationships" xmlns:p="http://schemas.openxmlformats.org/presentationml/2006/main" showMasterSp="0">
   <p:cSld>
     <p:bg>
